--- a/assets/pptx/catalog-540.pptx
+++ b/assets/pptx/catalog-540.pptx
@@ -4067,7 +4067,7 @@
                 <a:ea typeface="Ebrima"/>
                 <a:cs typeface="Ebrima"/>
               </a:rPr>
-              <a:t>ምንም ነው ምንም ነው (2x)</a:t>
+              <a:t>ምንም ነው ምንም ነው 2x</a:t>
             </a:r>
           </a:p>
           <a:p>
@@ -4085,7 +4085,7 @@
                 <a:ea typeface="Ebrima"/>
                 <a:cs typeface="Ebrima"/>
               </a:rPr>
-              <a:t>ቀላል ነው ቀላል ነው (2x)</a:t>
+              <a:t>ቀላል ነው ቀላል ነው 2x</a:t>
             </a:r>
           </a:p>
         </p:txBody>
@@ -4170,7 +4170,7 @@
                 <a:ea typeface="Ebrima"/>
                 <a:cs typeface="Ebrima"/>
               </a:rPr>
-              <a:t>ይህም በአምላኬ ዓይን ቀላል ነው (2x)</a:t>
+              <a:t>ይህም በአምላኬ ዓይን ቀላል ነው 2x</a:t>
             </a:r>
           </a:p>
         </p:txBody>
@@ -4237,7 +4237,7 @@
                 <a:ea typeface="Ebrima"/>
                 <a:cs typeface="Ebrima"/>
               </a:rPr>
-              <a:t>ቀላል ነው ቀላል ነው (2x)</a:t>
+              <a:t>ቀላል ነው ቀላል ነው 2x</a:t>
             </a:r>
           </a:p>
         </p:txBody>
@@ -4546,7 +4546,7 @@
                 <a:ea typeface="Ebrima"/>
                 <a:cs typeface="Ebrima"/>
               </a:rPr>
-              <a:t>አመልክሃለው አመልክሃለው (2x)</a:t>
+              <a:t>አመልክሃለው አመልክሃለው 2x</a:t>
             </a:r>
           </a:p>
         </p:txBody>
